--- a/Spec/spec.pptx
+++ b/Spec/spec.pptx
@@ -107,6 +107,11 @@
       </a:defRPr>
     </a:lvl9pPr>
   </p:defaultTextStyle>
+  <p:extLst>
+    <p:ext uri="{EFAFB233-063F-42B5-8137-9DF3F51BA10A}">
+      <p15:sldGuideLst xmlns:p15="http://schemas.microsoft.com/office/powerpoint/2012/main"/>
+    </p:ext>
+  </p:extLst>
 </p:presentation>
 </file>
 
@@ -9009,10 +9014,10 @@
       </p:grpSp>
       <p:grpSp>
         <p:nvGrpSpPr>
-          <p:cNvPr id="97" name="그룹 96">
+          <p:cNvPr id="102" name="그룹 101">
             <a:extLst>
               <a:ext uri="{FF2B5EF4-FFF2-40B4-BE49-F238E27FC236}">
-                <a16:creationId xmlns:a16="http://schemas.microsoft.com/office/drawing/2014/main" id="{A4B838AD-A505-1B60-153D-E87B3E69F905}"/>
+                <a16:creationId xmlns:a16="http://schemas.microsoft.com/office/drawing/2014/main" id="{7A103D66-F9AF-1DA3-8DE3-37015B18A4AA}"/>
               </a:ext>
             </a:extLst>
           </p:cNvPr>
@@ -9237,7 +9242,9 @@
               <a:avLst/>
             </a:prstGeom>
             <a:solidFill>
-              <a:schemeClr val="bg1"/>
+              <a:schemeClr val="bg1">
+                <a:lumMod val="85000"/>
+              </a:schemeClr>
             </a:solidFill>
           </p:spPr>
           <p:style>
@@ -9263,6 +9270,14 @@
             <a:lstStyle/>
             <a:p>
               <a:pPr algn="ctr"/>
+              <a:r>
+                <a:rPr lang="en-US" altLang="ko-KR" dirty="0">
+                  <a:solidFill>
+                    <a:schemeClr val="tx1"/>
+                  </a:solidFill>
+                </a:rPr>
+                <a:t>- Text</a:t>
+              </a:r>
               <a:endParaRPr lang="ko-KR" altLang="en-US" dirty="0">
                 <a:solidFill>
                   <a:schemeClr val="tx1"/>
@@ -9633,6 +9648,14 @@
             <a:lstStyle/>
             <a:p>
               <a:pPr algn="ctr"/>
+              <a:r>
+                <a:rPr lang="en-US" altLang="ko-KR" dirty="0">
+                  <a:solidFill>
+                    <a:schemeClr val="tx1"/>
+                  </a:solidFill>
+                </a:rPr>
+                <a:t>UI</a:t>
+              </a:r>
               <a:endParaRPr lang="ko-KR" altLang="en-US" dirty="0">
                 <a:solidFill>
                   <a:schemeClr val="tx1"/>
@@ -9662,83 +9685,9 @@
               <a:avLst/>
             </a:prstGeom>
             <a:solidFill>
-              <a:schemeClr val="bg1"/>
-            </a:solidFill>
-          </p:spPr>
-          <p:style>
-            <a:lnRef idx="2">
-              <a:schemeClr val="accent1">
-                <a:shade val="15000"/>
-              </a:schemeClr>
-            </a:lnRef>
-            <a:fillRef idx="1">
-              <a:schemeClr val="accent1"/>
-            </a:fillRef>
-            <a:effectRef idx="0">
-              <a:schemeClr val="accent1"/>
-            </a:effectRef>
-            <a:fontRef idx="minor">
-              <a:schemeClr val="lt1"/>
-            </a:fontRef>
-          </p:style>
-          <p:txBody>
-            <a:bodyPr rtlCol="0" anchor="ctr">
-              <a:normAutofit fontScale="40000" lnSpcReduction="20000"/>
-            </a:bodyPr>
-            <a:lstStyle/>
-            <a:p>
-              <a:pPr algn="ctr"/>
-              <a:endParaRPr lang="ko-KR" altLang="en-US" dirty="0">
-                <a:solidFill>
-                  <a:schemeClr val="tx1"/>
-                </a:solidFill>
-              </a:endParaRPr>
-            </a:p>
-          </p:txBody>
-        </p:sp>
-      </p:grpSp>
-      <p:grpSp>
-        <p:nvGrpSpPr>
-          <p:cNvPr id="98" name="그룹 97">
-            <a:extLst>
-              <a:ext uri="{FF2B5EF4-FFF2-40B4-BE49-F238E27FC236}">
-                <a16:creationId xmlns:a16="http://schemas.microsoft.com/office/drawing/2014/main" id="{AB02AD79-9B01-A7EA-A75D-5CE7AF33F07A}"/>
-              </a:ext>
-            </a:extLst>
-          </p:cNvPr>
-          <p:cNvGrpSpPr/>
-          <p:nvPr/>
-        </p:nvGrpSpPr>
-        <p:grpSpPr>
-          <a:xfrm>
-            <a:off x="9000000" y="0"/>
-            <a:ext cx="1440000" cy="1980000"/>
-            <a:chOff x="9000000" y="0"/>
-            <a:chExt cx="1440000" cy="1980000"/>
-          </a:xfrm>
-        </p:grpSpPr>
-        <p:sp>
-          <p:nvSpPr>
-            <p:cNvPr id="61" name="직사각형 60">
-              <a:extLst>
-                <a:ext uri="{FF2B5EF4-FFF2-40B4-BE49-F238E27FC236}">
-                  <a16:creationId xmlns:a16="http://schemas.microsoft.com/office/drawing/2014/main" id="{6C1A1DD0-4880-AA2E-C888-1BDA18B0A4AF}"/>
-                </a:ext>
-              </a:extLst>
-            </p:cNvPr>
-            <p:cNvSpPr/>
-            <p:nvPr/>
-          </p:nvSpPr>
-          <p:spPr>
-            <a:xfrm>
-              <a:off x="9000000" y="0"/>
-              <a:ext cx="720000" cy="180000"/>
-            </a:xfrm>
-            <a:prstGeom prst="rect">
-              <a:avLst/>
-            </a:prstGeom>
-            <a:solidFill>
-              <a:schemeClr val="bg1"/>
+              <a:schemeClr val="bg1">
+                <a:lumMod val="85000"/>
+              </a:schemeClr>
             </a:solidFill>
           </p:spPr>
           <p:style>
@@ -9770,655 +9719,7 @@
                     <a:schemeClr val="tx1"/>
                   </a:solidFill>
                 </a:rPr>
-                <a:t>+ (Inspector)</a:t>
-              </a:r>
-              <a:endParaRPr lang="ko-KR" altLang="en-US" dirty="0">
-                <a:solidFill>
-                  <a:schemeClr val="tx1"/>
-                </a:solidFill>
-              </a:endParaRPr>
-            </a:p>
-          </p:txBody>
-        </p:sp>
-        <p:sp>
-          <p:nvSpPr>
-            <p:cNvPr id="62" name="직사각형 61">
-              <a:extLst>
-                <a:ext uri="{FF2B5EF4-FFF2-40B4-BE49-F238E27FC236}">
-                  <a16:creationId xmlns:a16="http://schemas.microsoft.com/office/drawing/2014/main" id="{77B5A3E0-A6AC-5E51-839F-F69279BFFFCD}"/>
-                </a:ext>
-              </a:extLst>
-            </p:cNvPr>
-            <p:cNvSpPr/>
-            <p:nvPr/>
-          </p:nvSpPr>
-          <p:spPr>
-            <a:xfrm>
-              <a:off x="9000000" y="180000"/>
-              <a:ext cx="1440000" cy="180000"/>
-            </a:xfrm>
-            <a:prstGeom prst="rect">
-              <a:avLst/>
-            </a:prstGeom>
-            <a:solidFill>
-              <a:schemeClr val="bg1"/>
-            </a:solidFill>
-          </p:spPr>
-          <p:style>
-            <a:lnRef idx="2">
-              <a:schemeClr val="accent1">
-                <a:shade val="15000"/>
-              </a:schemeClr>
-            </a:lnRef>
-            <a:fillRef idx="1">
-              <a:schemeClr val="accent1"/>
-            </a:fillRef>
-            <a:effectRef idx="0">
-              <a:schemeClr val="accent1"/>
-            </a:effectRef>
-            <a:fontRef idx="minor">
-              <a:schemeClr val="lt1"/>
-            </a:fontRef>
-          </p:style>
-          <p:txBody>
-            <a:bodyPr rtlCol="0" anchor="ctr">
-              <a:normAutofit fontScale="40000" lnSpcReduction="20000"/>
-            </a:bodyPr>
-            <a:lstStyle/>
-            <a:p>
-              <a:pPr algn="ctr"/>
-              <a:r>
-                <a:rPr lang="en-US" altLang="ko-KR" dirty="0">
-                  <a:solidFill>
-                    <a:schemeClr val="tx1"/>
-                  </a:solidFill>
-                </a:rPr>
-                <a:t>Mesh</a:t>
-              </a:r>
-              <a:endParaRPr lang="ko-KR" altLang="en-US" dirty="0">
-                <a:solidFill>
-                  <a:schemeClr val="tx1"/>
-                </a:solidFill>
-              </a:endParaRPr>
-            </a:p>
-          </p:txBody>
-        </p:sp>
-        <p:sp>
-          <p:nvSpPr>
-            <p:cNvPr id="63" name="직사각형 62">
-              <a:extLst>
-                <a:ext uri="{FF2B5EF4-FFF2-40B4-BE49-F238E27FC236}">
-                  <a16:creationId xmlns:a16="http://schemas.microsoft.com/office/drawing/2014/main" id="{4FDA81BD-7C7D-3784-7531-2AD5F47BE8FF}"/>
-                </a:ext>
-              </a:extLst>
-            </p:cNvPr>
-            <p:cNvSpPr/>
-            <p:nvPr/>
-          </p:nvSpPr>
-          <p:spPr>
-            <a:xfrm>
-              <a:off x="9000000" y="360000"/>
-              <a:ext cx="1440000" cy="180000"/>
-            </a:xfrm>
-            <a:prstGeom prst="rect">
-              <a:avLst/>
-            </a:prstGeom>
-            <a:solidFill>
-              <a:schemeClr val="bg1"/>
-            </a:solidFill>
-          </p:spPr>
-          <p:style>
-            <a:lnRef idx="2">
-              <a:schemeClr val="accent1">
-                <a:shade val="15000"/>
-              </a:schemeClr>
-            </a:lnRef>
-            <a:fillRef idx="1">
-              <a:schemeClr val="accent1"/>
-            </a:fillRef>
-            <a:effectRef idx="0">
-              <a:schemeClr val="accent1"/>
-            </a:effectRef>
-            <a:fontRef idx="minor">
-              <a:schemeClr val="lt1"/>
-            </a:fontRef>
-          </p:style>
-          <p:txBody>
-            <a:bodyPr rtlCol="0" anchor="ctr">
-              <a:normAutofit fontScale="40000" lnSpcReduction="20000"/>
-            </a:bodyPr>
-            <a:lstStyle/>
-            <a:p>
-              <a:pPr algn="ctr"/>
-              <a:r>
-                <a:rPr lang="en-US" altLang="ko-KR" dirty="0">
-                  <a:solidFill>
-                    <a:schemeClr val="tx1"/>
-                  </a:solidFill>
-                </a:rPr>
-                <a:t>Physics</a:t>
-              </a:r>
-              <a:endParaRPr lang="ko-KR" altLang="en-US" dirty="0">
-                <a:solidFill>
-                  <a:schemeClr val="tx1"/>
-                </a:solidFill>
-              </a:endParaRPr>
-            </a:p>
-          </p:txBody>
-        </p:sp>
-        <p:sp>
-          <p:nvSpPr>
-            <p:cNvPr id="64" name="직사각형 63">
-              <a:extLst>
-                <a:ext uri="{FF2B5EF4-FFF2-40B4-BE49-F238E27FC236}">
-                  <a16:creationId xmlns:a16="http://schemas.microsoft.com/office/drawing/2014/main" id="{BF38DE31-48D4-64A4-140E-23EE4B8036EB}"/>
-                </a:ext>
-              </a:extLst>
-            </p:cNvPr>
-            <p:cNvSpPr/>
-            <p:nvPr/>
-          </p:nvSpPr>
-          <p:spPr>
-            <a:xfrm>
-              <a:off x="9000000" y="1800000"/>
-              <a:ext cx="1440000" cy="180000"/>
-            </a:xfrm>
-            <a:prstGeom prst="rect">
-              <a:avLst/>
-            </a:prstGeom>
-            <a:solidFill>
-              <a:schemeClr val="bg1"/>
-            </a:solidFill>
-          </p:spPr>
-          <p:style>
-            <a:lnRef idx="2">
-              <a:schemeClr val="accent1">
-                <a:shade val="15000"/>
-              </a:schemeClr>
-            </a:lnRef>
-            <a:fillRef idx="1">
-              <a:schemeClr val="accent1"/>
-            </a:fillRef>
-            <a:effectRef idx="0">
-              <a:schemeClr val="accent1"/>
-            </a:effectRef>
-            <a:fontRef idx="minor">
-              <a:schemeClr val="lt1"/>
-            </a:fontRef>
-          </p:style>
-          <p:txBody>
-            <a:bodyPr rtlCol="0" anchor="ctr">
-              <a:normAutofit fontScale="40000" lnSpcReduction="20000"/>
-            </a:bodyPr>
-            <a:lstStyle/>
-            <a:p>
-              <a:pPr algn="ctr"/>
-              <a:r>
-                <a:rPr lang="en-US" altLang="ko-KR" dirty="0">
-                  <a:solidFill>
-                    <a:schemeClr val="tx1"/>
-                  </a:solidFill>
-                </a:rPr>
-                <a:t>Light</a:t>
-              </a:r>
-              <a:endParaRPr lang="ko-KR" altLang="en-US" dirty="0">
-                <a:solidFill>
-                  <a:schemeClr val="tx1"/>
-                </a:solidFill>
-              </a:endParaRPr>
-            </a:p>
-          </p:txBody>
-        </p:sp>
-        <p:sp>
-          <p:nvSpPr>
-            <p:cNvPr id="65" name="직사각형 64">
-              <a:extLst>
-                <a:ext uri="{FF2B5EF4-FFF2-40B4-BE49-F238E27FC236}">
-                  <a16:creationId xmlns:a16="http://schemas.microsoft.com/office/drawing/2014/main" id="{A2A89123-6337-1DC9-E3ED-DD04697BD144}"/>
-                </a:ext>
-              </a:extLst>
-            </p:cNvPr>
-            <p:cNvSpPr/>
-            <p:nvPr/>
-          </p:nvSpPr>
-          <p:spPr>
-            <a:xfrm>
-              <a:off x="9000000" y="540000"/>
-              <a:ext cx="1440000" cy="180000"/>
-            </a:xfrm>
-            <a:prstGeom prst="rect">
-              <a:avLst/>
-            </a:prstGeom>
-            <a:solidFill>
-              <a:schemeClr val="bg1">
-                <a:lumMod val="85000"/>
-              </a:schemeClr>
-            </a:solidFill>
-          </p:spPr>
-          <p:style>
-            <a:lnRef idx="2">
-              <a:schemeClr val="accent1">
-                <a:shade val="15000"/>
-              </a:schemeClr>
-            </a:lnRef>
-            <a:fillRef idx="1">
-              <a:schemeClr val="accent1"/>
-            </a:fillRef>
-            <a:effectRef idx="0">
-              <a:schemeClr val="accent1"/>
-            </a:effectRef>
-            <a:fontRef idx="minor">
-              <a:schemeClr val="lt1"/>
-            </a:fontRef>
-          </p:style>
-          <p:txBody>
-            <a:bodyPr rtlCol="0" anchor="ctr">
-              <a:normAutofit fontScale="40000" lnSpcReduction="20000"/>
-            </a:bodyPr>
-            <a:lstStyle/>
-            <a:p>
-              <a:pPr algn="ctr"/>
-              <a:r>
-                <a:rPr lang="en-US" altLang="ko-KR" dirty="0">
-                  <a:solidFill>
-                    <a:schemeClr val="tx1"/>
-                  </a:solidFill>
-                </a:rPr>
-                <a:t>- Box Collider</a:t>
-              </a:r>
-              <a:endParaRPr lang="ko-KR" altLang="en-US" dirty="0">
-                <a:solidFill>
-                  <a:schemeClr val="tx1"/>
-                </a:solidFill>
-              </a:endParaRPr>
-            </a:p>
-          </p:txBody>
-        </p:sp>
-        <p:sp>
-          <p:nvSpPr>
-            <p:cNvPr id="66" name="직사각형 65">
-              <a:extLst>
-                <a:ext uri="{FF2B5EF4-FFF2-40B4-BE49-F238E27FC236}">
-                  <a16:creationId xmlns:a16="http://schemas.microsoft.com/office/drawing/2014/main" id="{EC44C70F-1301-0BE2-803B-D2507D2CB90C}"/>
-                </a:ext>
-              </a:extLst>
-            </p:cNvPr>
-            <p:cNvSpPr/>
-            <p:nvPr/>
-          </p:nvSpPr>
-          <p:spPr>
-            <a:xfrm>
-              <a:off x="9000000" y="720000"/>
-              <a:ext cx="1440000" cy="180000"/>
-            </a:xfrm>
-            <a:prstGeom prst="rect">
-              <a:avLst/>
-            </a:prstGeom>
-            <a:solidFill>
-              <a:schemeClr val="bg1">
-                <a:lumMod val="85000"/>
-              </a:schemeClr>
-            </a:solidFill>
-          </p:spPr>
-          <p:style>
-            <a:lnRef idx="2">
-              <a:schemeClr val="accent1">
-                <a:shade val="15000"/>
-              </a:schemeClr>
-            </a:lnRef>
-            <a:fillRef idx="1">
-              <a:schemeClr val="accent1"/>
-            </a:fillRef>
-            <a:effectRef idx="0">
-              <a:schemeClr val="accent1"/>
-            </a:effectRef>
-            <a:fontRef idx="minor">
-              <a:schemeClr val="lt1"/>
-            </a:fontRef>
-          </p:style>
-          <p:txBody>
-            <a:bodyPr rtlCol="0" anchor="ctr">
-              <a:normAutofit fontScale="40000" lnSpcReduction="20000"/>
-            </a:bodyPr>
-            <a:lstStyle/>
-            <a:p>
-              <a:pPr algn="ctr"/>
-              <a:r>
-                <a:rPr lang="en-US" altLang="ko-KR" dirty="0">
-                  <a:solidFill>
-                    <a:schemeClr val="tx1"/>
-                  </a:solidFill>
-                </a:rPr>
-                <a:t>- Sphere Collider</a:t>
-              </a:r>
-              <a:endParaRPr lang="ko-KR" altLang="en-US" dirty="0">
-                <a:solidFill>
-                  <a:schemeClr val="tx1"/>
-                </a:solidFill>
-              </a:endParaRPr>
-            </a:p>
-          </p:txBody>
-        </p:sp>
-        <p:sp>
-          <p:nvSpPr>
-            <p:cNvPr id="67" name="직사각형 66">
-              <a:extLst>
-                <a:ext uri="{FF2B5EF4-FFF2-40B4-BE49-F238E27FC236}">
-                  <a16:creationId xmlns:a16="http://schemas.microsoft.com/office/drawing/2014/main" id="{91697AC4-B572-0609-3863-22B16D4B9DDC}"/>
-                </a:ext>
-              </a:extLst>
-            </p:cNvPr>
-            <p:cNvSpPr/>
-            <p:nvPr/>
-          </p:nvSpPr>
-          <p:spPr>
-            <a:xfrm>
-              <a:off x="9000000" y="900000"/>
-              <a:ext cx="1440000" cy="180000"/>
-            </a:xfrm>
-            <a:prstGeom prst="rect">
-              <a:avLst/>
-            </a:prstGeom>
-            <a:solidFill>
-              <a:schemeClr val="bg1">
-                <a:lumMod val="85000"/>
-              </a:schemeClr>
-            </a:solidFill>
-          </p:spPr>
-          <p:style>
-            <a:lnRef idx="2">
-              <a:schemeClr val="accent1">
-                <a:shade val="15000"/>
-              </a:schemeClr>
-            </a:lnRef>
-            <a:fillRef idx="1">
-              <a:schemeClr val="accent1"/>
-            </a:fillRef>
-            <a:effectRef idx="0">
-              <a:schemeClr val="accent1"/>
-            </a:effectRef>
-            <a:fontRef idx="minor">
-              <a:schemeClr val="lt1"/>
-            </a:fontRef>
-          </p:style>
-          <p:txBody>
-            <a:bodyPr rtlCol="0" anchor="ctr">
-              <a:normAutofit fontScale="40000" lnSpcReduction="20000"/>
-            </a:bodyPr>
-            <a:lstStyle/>
-            <a:p>
-              <a:pPr algn="ctr"/>
-              <a:r>
-                <a:rPr lang="en-US" altLang="ko-KR" dirty="0">
-                  <a:solidFill>
-                    <a:schemeClr val="tx1"/>
-                  </a:solidFill>
-                </a:rPr>
-                <a:t>- </a:t>
-              </a:r>
-              <a:r>
-                <a:rPr lang="en-US" altLang="ko-KR" dirty="0" err="1">
-                  <a:solidFill>
-                    <a:schemeClr val="tx1"/>
-                  </a:solidFill>
-                </a:rPr>
-                <a:t>Rigidbody</a:t>
-              </a:r>
-              <a:endParaRPr lang="ko-KR" altLang="en-US" dirty="0">
-                <a:solidFill>
-                  <a:schemeClr val="tx1"/>
-                </a:solidFill>
-              </a:endParaRPr>
-            </a:p>
-          </p:txBody>
-        </p:sp>
-        <p:sp>
-          <p:nvSpPr>
-            <p:cNvPr id="68" name="직사각형 67">
-              <a:extLst>
-                <a:ext uri="{FF2B5EF4-FFF2-40B4-BE49-F238E27FC236}">
-                  <a16:creationId xmlns:a16="http://schemas.microsoft.com/office/drawing/2014/main" id="{B0C40C97-7EB0-5CC3-F4A1-4993A2DA513A}"/>
-                </a:ext>
-              </a:extLst>
-            </p:cNvPr>
-            <p:cNvSpPr/>
-            <p:nvPr/>
-          </p:nvSpPr>
-          <p:spPr>
-            <a:xfrm>
-              <a:off x="9000000" y="1080000"/>
-              <a:ext cx="1440000" cy="180000"/>
-            </a:xfrm>
-            <a:prstGeom prst="rect">
-              <a:avLst/>
-            </a:prstGeom>
-            <a:solidFill>
-              <a:schemeClr val="bg1"/>
-            </a:solidFill>
-          </p:spPr>
-          <p:style>
-            <a:lnRef idx="2">
-              <a:schemeClr val="accent1">
-                <a:shade val="15000"/>
-              </a:schemeClr>
-            </a:lnRef>
-            <a:fillRef idx="1">
-              <a:schemeClr val="accent1"/>
-            </a:fillRef>
-            <a:effectRef idx="0">
-              <a:schemeClr val="accent1"/>
-            </a:effectRef>
-            <a:fontRef idx="minor">
-              <a:schemeClr val="lt1"/>
-            </a:fontRef>
-          </p:style>
-          <p:txBody>
-            <a:bodyPr rtlCol="0" anchor="ctr">
-              <a:normAutofit fontScale="40000" lnSpcReduction="20000"/>
-            </a:bodyPr>
-            <a:lstStyle/>
-            <a:p>
-              <a:pPr algn="ctr"/>
-              <a:r>
-                <a:rPr lang="en-US" altLang="ko-KR" dirty="0">
-                  <a:solidFill>
-                    <a:schemeClr val="tx1"/>
-                  </a:solidFill>
-                </a:rPr>
-                <a:t>Scripts</a:t>
-              </a:r>
-              <a:endParaRPr lang="ko-KR" altLang="en-US" dirty="0">
-                <a:solidFill>
-                  <a:schemeClr val="tx1"/>
-                </a:solidFill>
-              </a:endParaRPr>
-            </a:p>
-          </p:txBody>
-        </p:sp>
-        <p:sp>
-          <p:nvSpPr>
-            <p:cNvPr id="69" name="직사각형 68">
-              <a:extLst>
-                <a:ext uri="{FF2B5EF4-FFF2-40B4-BE49-F238E27FC236}">
-                  <a16:creationId xmlns:a16="http://schemas.microsoft.com/office/drawing/2014/main" id="{2E2F2F3A-4065-B284-DDA6-3BBBA3E8C218}"/>
-                </a:ext>
-              </a:extLst>
-            </p:cNvPr>
-            <p:cNvSpPr/>
-            <p:nvPr/>
-          </p:nvSpPr>
-          <p:spPr>
-            <a:xfrm>
-              <a:off x="9000000" y="1260000"/>
-              <a:ext cx="1440000" cy="180000"/>
-            </a:xfrm>
-            <a:prstGeom prst="rect">
-              <a:avLst/>
-            </a:prstGeom>
-            <a:solidFill>
-              <a:schemeClr val="bg1">
-                <a:lumMod val="85000"/>
-              </a:schemeClr>
-            </a:solidFill>
-          </p:spPr>
-          <p:style>
-            <a:lnRef idx="2">
-              <a:schemeClr val="accent1">
-                <a:shade val="15000"/>
-              </a:schemeClr>
-            </a:lnRef>
-            <a:fillRef idx="1">
-              <a:schemeClr val="accent1"/>
-            </a:fillRef>
-            <a:effectRef idx="0">
-              <a:schemeClr val="accent1"/>
-            </a:effectRef>
-            <a:fontRef idx="minor">
-              <a:schemeClr val="lt1"/>
-            </a:fontRef>
-          </p:style>
-          <p:txBody>
-            <a:bodyPr rtlCol="0" anchor="ctr">
-              <a:normAutofit fontScale="40000" lnSpcReduction="20000"/>
-            </a:bodyPr>
-            <a:lstStyle/>
-            <a:p>
-              <a:pPr algn="ctr"/>
-              <a:r>
-                <a:rPr lang="en-US" altLang="ko-KR" dirty="0">
-                  <a:solidFill>
-                    <a:schemeClr val="tx1"/>
-                  </a:solidFill>
-                </a:rPr>
-                <a:t>- Script …</a:t>
-              </a:r>
-              <a:endParaRPr lang="ko-KR" altLang="en-US" dirty="0">
-                <a:solidFill>
-                  <a:schemeClr val="tx1"/>
-                </a:solidFill>
-              </a:endParaRPr>
-            </a:p>
-          </p:txBody>
-        </p:sp>
-        <p:sp>
-          <p:nvSpPr>
-            <p:cNvPr id="70" name="직사각형 69">
-              <a:extLst>
-                <a:ext uri="{FF2B5EF4-FFF2-40B4-BE49-F238E27FC236}">
-                  <a16:creationId xmlns:a16="http://schemas.microsoft.com/office/drawing/2014/main" id="{855566FA-E411-28BE-4607-65A9F6B14F6E}"/>
-                </a:ext>
-              </a:extLst>
-            </p:cNvPr>
-            <p:cNvSpPr/>
-            <p:nvPr/>
-          </p:nvSpPr>
-          <p:spPr>
-            <a:xfrm>
-              <a:off x="9000000" y="1440000"/>
-              <a:ext cx="1440000" cy="180000"/>
-            </a:xfrm>
-            <a:prstGeom prst="rect">
-              <a:avLst/>
-            </a:prstGeom>
-            <a:solidFill>
-              <a:schemeClr val="bg1">
-                <a:lumMod val="85000"/>
-              </a:schemeClr>
-            </a:solidFill>
-          </p:spPr>
-          <p:style>
-            <a:lnRef idx="2">
-              <a:schemeClr val="accent1">
-                <a:shade val="15000"/>
-              </a:schemeClr>
-            </a:lnRef>
-            <a:fillRef idx="1">
-              <a:schemeClr val="accent1"/>
-            </a:fillRef>
-            <a:effectRef idx="0">
-              <a:schemeClr val="accent1"/>
-            </a:effectRef>
-            <a:fontRef idx="minor">
-              <a:schemeClr val="lt1"/>
-            </a:fontRef>
-          </p:style>
-          <p:txBody>
-            <a:bodyPr rtlCol="0" anchor="ctr">
-              <a:normAutofit fontScale="40000" lnSpcReduction="20000"/>
-            </a:bodyPr>
-            <a:lstStyle/>
-            <a:p>
-              <a:pPr algn="ctr"/>
-              <a:r>
-                <a:rPr lang="en-US" altLang="ko-KR" dirty="0">
-                  <a:solidFill>
-                    <a:schemeClr val="tx1"/>
-                  </a:solidFill>
-                </a:rPr>
-                <a:t>- New Script</a:t>
-              </a:r>
-              <a:endParaRPr lang="ko-KR" altLang="en-US" dirty="0">
-                <a:solidFill>
-                  <a:schemeClr val="tx1"/>
-                </a:solidFill>
-              </a:endParaRPr>
-            </a:p>
-          </p:txBody>
-        </p:sp>
-        <p:sp>
-          <p:nvSpPr>
-            <p:cNvPr id="71" name="직사각형 70">
-              <a:extLst>
-                <a:ext uri="{FF2B5EF4-FFF2-40B4-BE49-F238E27FC236}">
-                  <a16:creationId xmlns:a16="http://schemas.microsoft.com/office/drawing/2014/main" id="{2FD5D4B1-9346-9C9B-DE0E-8169DB92BB46}"/>
-                </a:ext>
-              </a:extLst>
-            </p:cNvPr>
-            <p:cNvSpPr/>
-            <p:nvPr/>
-          </p:nvSpPr>
-          <p:spPr>
-            <a:xfrm>
-              <a:off x="9000000" y="1620000"/>
-              <a:ext cx="1440000" cy="180000"/>
-            </a:xfrm>
-            <a:prstGeom prst="rect">
-              <a:avLst/>
-            </a:prstGeom>
-            <a:solidFill>
-              <a:schemeClr val="bg1"/>
-            </a:solidFill>
-          </p:spPr>
-          <p:style>
-            <a:lnRef idx="2">
-              <a:schemeClr val="accent1">
-                <a:shade val="15000"/>
-              </a:schemeClr>
-            </a:lnRef>
-            <a:fillRef idx="1">
-              <a:schemeClr val="accent1"/>
-            </a:fillRef>
-            <a:effectRef idx="0">
-              <a:schemeClr val="accent1"/>
-            </a:effectRef>
-            <a:fontRef idx="minor">
-              <a:schemeClr val="lt1"/>
-            </a:fontRef>
-          </p:style>
-          <p:txBody>
-            <a:bodyPr rtlCol="0" anchor="ctr">
-              <a:normAutofit fontScale="40000" lnSpcReduction="20000"/>
-            </a:bodyPr>
-            <a:lstStyle/>
-            <a:p>
-              <a:pPr algn="ctr"/>
-              <a:r>
-                <a:rPr lang="en-US" altLang="ko-KR" dirty="0">
-                  <a:solidFill>
-                    <a:schemeClr val="tx1"/>
-                  </a:solidFill>
-                </a:rPr>
-                <a:t>Camera</a:t>
+                <a:t>- Canvas</a:t>
               </a:r>
               <a:endParaRPr lang="ko-KR" altLang="en-US" dirty="0">
                 <a:solidFill>
@@ -11744,6 +11045,931 @@
             <a:lstStyle/>
             <a:p>
               <a:pPr algn="ctr"/>
+              <a:endParaRPr lang="ko-KR" altLang="en-US" dirty="0">
+                <a:solidFill>
+                  <a:schemeClr val="tx1"/>
+                </a:solidFill>
+              </a:endParaRPr>
+            </a:p>
+          </p:txBody>
+        </p:sp>
+      </p:grpSp>
+      <p:grpSp>
+        <p:nvGrpSpPr>
+          <p:cNvPr id="101" name="그룹 100">
+            <a:extLst>
+              <a:ext uri="{FF2B5EF4-FFF2-40B4-BE49-F238E27FC236}">
+                <a16:creationId xmlns:a16="http://schemas.microsoft.com/office/drawing/2014/main" id="{F331A93D-4A26-DAC3-B0EA-C8B092E5D7E8}"/>
+              </a:ext>
+            </a:extLst>
+          </p:cNvPr>
+          <p:cNvGrpSpPr/>
+          <p:nvPr/>
+        </p:nvGrpSpPr>
+        <p:grpSpPr>
+          <a:xfrm>
+            <a:off x="9000000" y="0"/>
+            <a:ext cx="1440000" cy="2520000"/>
+            <a:chOff x="9000000" y="0"/>
+            <a:chExt cx="1440000" cy="2520000"/>
+          </a:xfrm>
+        </p:grpSpPr>
+        <p:sp>
+          <p:nvSpPr>
+            <p:cNvPr id="61" name="직사각형 60">
+              <a:extLst>
+                <a:ext uri="{FF2B5EF4-FFF2-40B4-BE49-F238E27FC236}">
+                  <a16:creationId xmlns:a16="http://schemas.microsoft.com/office/drawing/2014/main" id="{6C1A1DD0-4880-AA2E-C888-1BDA18B0A4AF}"/>
+                </a:ext>
+              </a:extLst>
+            </p:cNvPr>
+            <p:cNvSpPr/>
+            <p:nvPr/>
+          </p:nvSpPr>
+          <p:spPr>
+            <a:xfrm>
+              <a:off x="9000000" y="0"/>
+              <a:ext cx="720000" cy="180000"/>
+            </a:xfrm>
+            <a:prstGeom prst="rect">
+              <a:avLst/>
+            </a:prstGeom>
+            <a:solidFill>
+              <a:schemeClr val="bg1"/>
+            </a:solidFill>
+          </p:spPr>
+          <p:style>
+            <a:lnRef idx="2">
+              <a:schemeClr val="accent1">
+                <a:shade val="15000"/>
+              </a:schemeClr>
+            </a:lnRef>
+            <a:fillRef idx="1">
+              <a:schemeClr val="accent1"/>
+            </a:fillRef>
+            <a:effectRef idx="0">
+              <a:schemeClr val="accent1"/>
+            </a:effectRef>
+            <a:fontRef idx="minor">
+              <a:schemeClr val="lt1"/>
+            </a:fontRef>
+          </p:style>
+          <p:txBody>
+            <a:bodyPr rtlCol="0" anchor="ctr">
+              <a:normAutofit fontScale="40000" lnSpcReduction="20000"/>
+            </a:bodyPr>
+            <a:lstStyle/>
+            <a:p>
+              <a:pPr algn="ctr"/>
+              <a:r>
+                <a:rPr lang="en-US" altLang="ko-KR" dirty="0">
+                  <a:solidFill>
+                    <a:schemeClr val="tx1"/>
+                  </a:solidFill>
+                </a:rPr>
+                <a:t>+ (Inspector)</a:t>
+              </a:r>
+              <a:endParaRPr lang="ko-KR" altLang="en-US" dirty="0">
+                <a:solidFill>
+                  <a:schemeClr val="tx1"/>
+                </a:solidFill>
+              </a:endParaRPr>
+            </a:p>
+          </p:txBody>
+        </p:sp>
+        <p:sp>
+          <p:nvSpPr>
+            <p:cNvPr id="62" name="직사각형 61">
+              <a:extLst>
+                <a:ext uri="{FF2B5EF4-FFF2-40B4-BE49-F238E27FC236}">
+                  <a16:creationId xmlns:a16="http://schemas.microsoft.com/office/drawing/2014/main" id="{77B5A3E0-A6AC-5E51-839F-F69279BFFFCD}"/>
+                </a:ext>
+              </a:extLst>
+            </p:cNvPr>
+            <p:cNvSpPr/>
+            <p:nvPr/>
+          </p:nvSpPr>
+          <p:spPr>
+            <a:xfrm>
+              <a:off x="9000000" y="180000"/>
+              <a:ext cx="1440000" cy="180000"/>
+            </a:xfrm>
+            <a:prstGeom prst="rect">
+              <a:avLst/>
+            </a:prstGeom>
+            <a:solidFill>
+              <a:schemeClr val="bg1"/>
+            </a:solidFill>
+          </p:spPr>
+          <p:style>
+            <a:lnRef idx="2">
+              <a:schemeClr val="accent1">
+                <a:shade val="15000"/>
+              </a:schemeClr>
+            </a:lnRef>
+            <a:fillRef idx="1">
+              <a:schemeClr val="accent1"/>
+            </a:fillRef>
+            <a:effectRef idx="0">
+              <a:schemeClr val="accent1"/>
+            </a:effectRef>
+            <a:fontRef idx="minor">
+              <a:schemeClr val="lt1"/>
+            </a:fontRef>
+          </p:style>
+          <p:txBody>
+            <a:bodyPr rtlCol="0" anchor="ctr">
+              <a:normAutofit fontScale="40000" lnSpcReduction="20000"/>
+            </a:bodyPr>
+            <a:lstStyle/>
+            <a:p>
+              <a:pPr algn="ctr"/>
+              <a:r>
+                <a:rPr lang="en-US" altLang="ko-KR" dirty="0">
+                  <a:solidFill>
+                    <a:schemeClr val="tx1"/>
+                  </a:solidFill>
+                </a:rPr>
+                <a:t>Mesh</a:t>
+              </a:r>
+              <a:endParaRPr lang="ko-KR" altLang="en-US" dirty="0">
+                <a:solidFill>
+                  <a:schemeClr val="tx1"/>
+                </a:solidFill>
+              </a:endParaRPr>
+            </a:p>
+          </p:txBody>
+        </p:sp>
+        <p:sp>
+          <p:nvSpPr>
+            <p:cNvPr id="63" name="직사각형 62">
+              <a:extLst>
+                <a:ext uri="{FF2B5EF4-FFF2-40B4-BE49-F238E27FC236}">
+                  <a16:creationId xmlns:a16="http://schemas.microsoft.com/office/drawing/2014/main" id="{4FDA81BD-7C7D-3784-7531-2AD5F47BE8FF}"/>
+                </a:ext>
+              </a:extLst>
+            </p:cNvPr>
+            <p:cNvSpPr/>
+            <p:nvPr/>
+          </p:nvSpPr>
+          <p:spPr>
+            <a:xfrm>
+              <a:off x="9000000" y="360000"/>
+              <a:ext cx="1440000" cy="180000"/>
+            </a:xfrm>
+            <a:prstGeom prst="rect">
+              <a:avLst/>
+            </a:prstGeom>
+            <a:solidFill>
+              <a:schemeClr val="bg1"/>
+            </a:solidFill>
+          </p:spPr>
+          <p:style>
+            <a:lnRef idx="2">
+              <a:schemeClr val="accent1">
+                <a:shade val="15000"/>
+              </a:schemeClr>
+            </a:lnRef>
+            <a:fillRef idx="1">
+              <a:schemeClr val="accent1"/>
+            </a:fillRef>
+            <a:effectRef idx="0">
+              <a:schemeClr val="accent1"/>
+            </a:effectRef>
+            <a:fontRef idx="minor">
+              <a:schemeClr val="lt1"/>
+            </a:fontRef>
+          </p:style>
+          <p:txBody>
+            <a:bodyPr rtlCol="0" anchor="ctr">
+              <a:normAutofit fontScale="40000" lnSpcReduction="20000"/>
+            </a:bodyPr>
+            <a:lstStyle/>
+            <a:p>
+              <a:pPr algn="ctr"/>
+              <a:r>
+                <a:rPr lang="en-US" altLang="ko-KR" dirty="0">
+                  <a:solidFill>
+                    <a:schemeClr val="tx1"/>
+                  </a:solidFill>
+                </a:rPr>
+                <a:t>Physics</a:t>
+              </a:r>
+              <a:endParaRPr lang="ko-KR" altLang="en-US" dirty="0">
+                <a:solidFill>
+                  <a:schemeClr val="tx1"/>
+                </a:solidFill>
+              </a:endParaRPr>
+            </a:p>
+          </p:txBody>
+        </p:sp>
+        <p:sp>
+          <p:nvSpPr>
+            <p:cNvPr id="64" name="직사각형 63">
+              <a:extLst>
+                <a:ext uri="{FF2B5EF4-FFF2-40B4-BE49-F238E27FC236}">
+                  <a16:creationId xmlns:a16="http://schemas.microsoft.com/office/drawing/2014/main" id="{BF38DE31-48D4-64A4-140E-23EE4B8036EB}"/>
+                </a:ext>
+              </a:extLst>
+            </p:cNvPr>
+            <p:cNvSpPr/>
+            <p:nvPr/>
+          </p:nvSpPr>
+          <p:spPr>
+            <a:xfrm>
+              <a:off x="9000000" y="1800000"/>
+              <a:ext cx="1440000" cy="180000"/>
+            </a:xfrm>
+            <a:prstGeom prst="rect">
+              <a:avLst/>
+            </a:prstGeom>
+            <a:solidFill>
+              <a:schemeClr val="bg1"/>
+            </a:solidFill>
+          </p:spPr>
+          <p:style>
+            <a:lnRef idx="2">
+              <a:schemeClr val="accent1">
+                <a:shade val="15000"/>
+              </a:schemeClr>
+            </a:lnRef>
+            <a:fillRef idx="1">
+              <a:schemeClr val="accent1"/>
+            </a:fillRef>
+            <a:effectRef idx="0">
+              <a:schemeClr val="accent1"/>
+            </a:effectRef>
+            <a:fontRef idx="minor">
+              <a:schemeClr val="lt1"/>
+            </a:fontRef>
+          </p:style>
+          <p:txBody>
+            <a:bodyPr rtlCol="0" anchor="ctr">
+              <a:normAutofit fontScale="40000" lnSpcReduction="20000"/>
+            </a:bodyPr>
+            <a:lstStyle/>
+            <a:p>
+              <a:pPr algn="ctr"/>
+              <a:r>
+                <a:rPr lang="en-US" altLang="ko-KR" dirty="0">
+                  <a:solidFill>
+                    <a:schemeClr val="tx1"/>
+                  </a:solidFill>
+                </a:rPr>
+                <a:t>Light</a:t>
+              </a:r>
+              <a:endParaRPr lang="ko-KR" altLang="en-US" dirty="0">
+                <a:solidFill>
+                  <a:schemeClr val="tx1"/>
+                </a:solidFill>
+              </a:endParaRPr>
+            </a:p>
+          </p:txBody>
+        </p:sp>
+        <p:sp>
+          <p:nvSpPr>
+            <p:cNvPr id="65" name="직사각형 64">
+              <a:extLst>
+                <a:ext uri="{FF2B5EF4-FFF2-40B4-BE49-F238E27FC236}">
+                  <a16:creationId xmlns:a16="http://schemas.microsoft.com/office/drawing/2014/main" id="{A2A89123-6337-1DC9-E3ED-DD04697BD144}"/>
+                </a:ext>
+              </a:extLst>
+            </p:cNvPr>
+            <p:cNvSpPr/>
+            <p:nvPr/>
+          </p:nvSpPr>
+          <p:spPr>
+            <a:xfrm>
+              <a:off x="9000000" y="540000"/>
+              <a:ext cx="1440000" cy="180000"/>
+            </a:xfrm>
+            <a:prstGeom prst="rect">
+              <a:avLst/>
+            </a:prstGeom>
+            <a:solidFill>
+              <a:schemeClr val="bg1">
+                <a:lumMod val="85000"/>
+              </a:schemeClr>
+            </a:solidFill>
+          </p:spPr>
+          <p:style>
+            <a:lnRef idx="2">
+              <a:schemeClr val="accent1">
+                <a:shade val="15000"/>
+              </a:schemeClr>
+            </a:lnRef>
+            <a:fillRef idx="1">
+              <a:schemeClr val="accent1"/>
+            </a:fillRef>
+            <a:effectRef idx="0">
+              <a:schemeClr val="accent1"/>
+            </a:effectRef>
+            <a:fontRef idx="minor">
+              <a:schemeClr val="lt1"/>
+            </a:fontRef>
+          </p:style>
+          <p:txBody>
+            <a:bodyPr rtlCol="0" anchor="ctr">
+              <a:normAutofit fontScale="40000" lnSpcReduction="20000"/>
+            </a:bodyPr>
+            <a:lstStyle/>
+            <a:p>
+              <a:pPr algn="ctr"/>
+              <a:r>
+                <a:rPr lang="en-US" altLang="ko-KR" dirty="0">
+                  <a:solidFill>
+                    <a:schemeClr val="tx1"/>
+                  </a:solidFill>
+                </a:rPr>
+                <a:t>- Box Collider</a:t>
+              </a:r>
+              <a:endParaRPr lang="ko-KR" altLang="en-US" dirty="0">
+                <a:solidFill>
+                  <a:schemeClr val="tx1"/>
+                </a:solidFill>
+              </a:endParaRPr>
+            </a:p>
+          </p:txBody>
+        </p:sp>
+        <p:sp>
+          <p:nvSpPr>
+            <p:cNvPr id="66" name="직사각형 65">
+              <a:extLst>
+                <a:ext uri="{FF2B5EF4-FFF2-40B4-BE49-F238E27FC236}">
+                  <a16:creationId xmlns:a16="http://schemas.microsoft.com/office/drawing/2014/main" id="{EC44C70F-1301-0BE2-803B-D2507D2CB90C}"/>
+                </a:ext>
+              </a:extLst>
+            </p:cNvPr>
+            <p:cNvSpPr/>
+            <p:nvPr/>
+          </p:nvSpPr>
+          <p:spPr>
+            <a:xfrm>
+              <a:off x="9000000" y="720000"/>
+              <a:ext cx="1440000" cy="180000"/>
+            </a:xfrm>
+            <a:prstGeom prst="rect">
+              <a:avLst/>
+            </a:prstGeom>
+            <a:solidFill>
+              <a:schemeClr val="bg1">
+                <a:lumMod val="85000"/>
+              </a:schemeClr>
+            </a:solidFill>
+          </p:spPr>
+          <p:style>
+            <a:lnRef idx="2">
+              <a:schemeClr val="accent1">
+                <a:shade val="15000"/>
+              </a:schemeClr>
+            </a:lnRef>
+            <a:fillRef idx="1">
+              <a:schemeClr val="accent1"/>
+            </a:fillRef>
+            <a:effectRef idx="0">
+              <a:schemeClr val="accent1"/>
+            </a:effectRef>
+            <a:fontRef idx="minor">
+              <a:schemeClr val="lt1"/>
+            </a:fontRef>
+          </p:style>
+          <p:txBody>
+            <a:bodyPr rtlCol="0" anchor="ctr">
+              <a:normAutofit fontScale="40000" lnSpcReduction="20000"/>
+            </a:bodyPr>
+            <a:lstStyle/>
+            <a:p>
+              <a:pPr algn="ctr"/>
+              <a:r>
+                <a:rPr lang="en-US" altLang="ko-KR" dirty="0">
+                  <a:solidFill>
+                    <a:schemeClr val="tx1"/>
+                  </a:solidFill>
+                </a:rPr>
+                <a:t>- Sphere Collider</a:t>
+              </a:r>
+              <a:endParaRPr lang="ko-KR" altLang="en-US" dirty="0">
+                <a:solidFill>
+                  <a:schemeClr val="tx1"/>
+                </a:solidFill>
+              </a:endParaRPr>
+            </a:p>
+          </p:txBody>
+        </p:sp>
+        <p:sp>
+          <p:nvSpPr>
+            <p:cNvPr id="67" name="직사각형 66">
+              <a:extLst>
+                <a:ext uri="{FF2B5EF4-FFF2-40B4-BE49-F238E27FC236}">
+                  <a16:creationId xmlns:a16="http://schemas.microsoft.com/office/drawing/2014/main" id="{91697AC4-B572-0609-3863-22B16D4B9DDC}"/>
+                </a:ext>
+              </a:extLst>
+            </p:cNvPr>
+            <p:cNvSpPr/>
+            <p:nvPr/>
+          </p:nvSpPr>
+          <p:spPr>
+            <a:xfrm>
+              <a:off x="9000000" y="900000"/>
+              <a:ext cx="1440000" cy="180000"/>
+            </a:xfrm>
+            <a:prstGeom prst="rect">
+              <a:avLst/>
+            </a:prstGeom>
+            <a:solidFill>
+              <a:schemeClr val="bg1">
+                <a:lumMod val="85000"/>
+              </a:schemeClr>
+            </a:solidFill>
+          </p:spPr>
+          <p:style>
+            <a:lnRef idx="2">
+              <a:schemeClr val="accent1">
+                <a:shade val="15000"/>
+              </a:schemeClr>
+            </a:lnRef>
+            <a:fillRef idx="1">
+              <a:schemeClr val="accent1"/>
+            </a:fillRef>
+            <a:effectRef idx="0">
+              <a:schemeClr val="accent1"/>
+            </a:effectRef>
+            <a:fontRef idx="minor">
+              <a:schemeClr val="lt1"/>
+            </a:fontRef>
+          </p:style>
+          <p:txBody>
+            <a:bodyPr rtlCol="0" anchor="ctr">
+              <a:normAutofit fontScale="40000" lnSpcReduction="20000"/>
+            </a:bodyPr>
+            <a:lstStyle/>
+            <a:p>
+              <a:pPr algn="ctr"/>
+              <a:r>
+                <a:rPr lang="en-US" altLang="ko-KR" dirty="0">
+                  <a:solidFill>
+                    <a:schemeClr val="tx1"/>
+                  </a:solidFill>
+                </a:rPr>
+                <a:t>- </a:t>
+              </a:r>
+              <a:r>
+                <a:rPr lang="en-US" altLang="ko-KR" dirty="0" err="1">
+                  <a:solidFill>
+                    <a:schemeClr val="tx1"/>
+                  </a:solidFill>
+                </a:rPr>
+                <a:t>Rigidbody</a:t>
+              </a:r>
+              <a:endParaRPr lang="ko-KR" altLang="en-US" dirty="0">
+                <a:solidFill>
+                  <a:schemeClr val="tx1"/>
+                </a:solidFill>
+              </a:endParaRPr>
+            </a:p>
+          </p:txBody>
+        </p:sp>
+        <p:sp>
+          <p:nvSpPr>
+            <p:cNvPr id="68" name="직사각형 67">
+              <a:extLst>
+                <a:ext uri="{FF2B5EF4-FFF2-40B4-BE49-F238E27FC236}">
+                  <a16:creationId xmlns:a16="http://schemas.microsoft.com/office/drawing/2014/main" id="{B0C40C97-7EB0-5CC3-F4A1-4993A2DA513A}"/>
+                </a:ext>
+              </a:extLst>
+            </p:cNvPr>
+            <p:cNvSpPr/>
+            <p:nvPr/>
+          </p:nvSpPr>
+          <p:spPr>
+            <a:xfrm>
+              <a:off x="9000000" y="1080000"/>
+              <a:ext cx="1440000" cy="180000"/>
+            </a:xfrm>
+            <a:prstGeom prst="rect">
+              <a:avLst/>
+            </a:prstGeom>
+            <a:solidFill>
+              <a:schemeClr val="bg1"/>
+            </a:solidFill>
+          </p:spPr>
+          <p:style>
+            <a:lnRef idx="2">
+              <a:schemeClr val="accent1">
+                <a:shade val="15000"/>
+              </a:schemeClr>
+            </a:lnRef>
+            <a:fillRef idx="1">
+              <a:schemeClr val="accent1"/>
+            </a:fillRef>
+            <a:effectRef idx="0">
+              <a:schemeClr val="accent1"/>
+            </a:effectRef>
+            <a:fontRef idx="minor">
+              <a:schemeClr val="lt1"/>
+            </a:fontRef>
+          </p:style>
+          <p:txBody>
+            <a:bodyPr rtlCol="0" anchor="ctr">
+              <a:normAutofit fontScale="40000" lnSpcReduction="20000"/>
+            </a:bodyPr>
+            <a:lstStyle/>
+            <a:p>
+              <a:pPr algn="ctr"/>
+              <a:r>
+                <a:rPr lang="en-US" altLang="ko-KR" dirty="0">
+                  <a:solidFill>
+                    <a:schemeClr val="tx1"/>
+                  </a:solidFill>
+                </a:rPr>
+                <a:t>Scripts</a:t>
+              </a:r>
+              <a:endParaRPr lang="ko-KR" altLang="en-US" dirty="0">
+                <a:solidFill>
+                  <a:schemeClr val="tx1"/>
+                </a:solidFill>
+              </a:endParaRPr>
+            </a:p>
+          </p:txBody>
+        </p:sp>
+        <p:sp>
+          <p:nvSpPr>
+            <p:cNvPr id="69" name="직사각형 68">
+              <a:extLst>
+                <a:ext uri="{FF2B5EF4-FFF2-40B4-BE49-F238E27FC236}">
+                  <a16:creationId xmlns:a16="http://schemas.microsoft.com/office/drawing/2014/main" id="{2E2F2F3A-4065-B284-DDA6-3BBBA3E8C218}"/>
+                </a:ext>
+              </a:extLst>
+            </p:cNvPr>
+            <p:cNvSpPr/>
+            <p:nvPr/>
+          </p:nvSpPr>
+          <p:spPr>
+            <a:xfrm>
+              <a:off x="9000000" y="1260000"/>
+              <a:ext cx="1440000" cy="180000"/>
+            </a:xfrm>
+            <a:prstGeom prst="rect">
+              <a:avLst/>
+            </a:prstGeom>
+            <a:solidFill>
+              <a:schemeClr val="bg1">
+                <a:lumMod val="85000"/>
+              </a:schemeClr>
+            </a:solidFill>
+          </p:spPr>
+          <p:style>
+            <a:lnRef idx="2">
+              <a:schemeClr val="accent1">
+                <a:shade val="15000"/>
+              </a:schemeClr>
+            </a:lnRef>
+            <a:fillRef idx="1">
+              <a:schemeClr val="accent1"/>
+            </a:fillRef>
+            <a:effectRef idx="0">
+              <a:schemeClr val="accent1"/>
+            </a:effectRef>
+            <a:fontRef idx="minor">
+              <a:schemeClr val="lt1"/>
+            </a:fontRef>
+          </p:style>
+          <p:txBody>
+            <a:bodyPr rtlCol="0" anchor="ctr">
+              <a:normAutofit fontScale="40000" lnSpcReduction="20000"/>
+            </a:bodyPr>
+            <a:lstStyle/>
+            <a:p>
+              <a:pPr algn="ctr"/>
+              <a:r>
+                <a:rPr lang="en-US" altLang="ko-KR" dirty="0">
+                  <a:solidFill>
+                    <a:schemeClr val="tx1"/>
+                  </a:solidFill>
+                </a:rPr>
+                <a:t>- Script …</a:t>
+              </a:r>
+              <a:endParaRPr lang="ko-KR" altLang="en-US" dirty="0">
+                <a:solidFill>
+                  <a:schemeClr val="tx1"/>
+                </a:solidFill>
+              </a:endParaRPr>
+            </a:p>
+          </p:txBody>
+        </p:sp>
+        <p:sp>
+          <p:nvSpPr>
+            <p:cNvPr id="70" name="직사각형 69">
+              <a:extLst>
+                <a:ext uri="{FF2B5EF4-FFF2-40B4-BE49-F238E27FC236}">
+                  <a16:creationId xmlns:a16="http://schemas.microsoft.com/office/drawing/2014/main" id="{855566FA-E411-28BE-4607-65A9F6B14F6E}"/>
+                </a:ext>
+              </a:extLst>
+            </p:cNvPr>
+            <p:cNvSpPr/>
+            <p:nvPr/>
+          </p:nvSpPr>
+          <p:spPr>
+            <a:xfrm>
+              <a:off x="9000000" y="1440000"/>
+              <a:ext cx="1440000" cy="180000"/>
+            </a:xfrm>
+            <a:prstGeom prst="rect">
+              <a:avLst/>
+            </a:prstGeom>
+            <a:solidFill>
+              <a:schemeClr val="bg1">
+                <a:lumMod val="85000"/>
+              </a:schemeClr>
+            </a:solidFill>
+          </p:spPr>
+          <p:style>
+            <a:lnRef idx="2">
+              <a:schemeClr val="accent1">
+                <a:shade val="15000"/>
+              </a:schemeClr>
+            </a:lnRef>
+            <a:fillRef idx="1">
+              <a:schemeClr val="accent1"/>
+            </a:fillRef>
+            <a:effectRef idx="0">
+              <a:schemeClr val="accent1"/>
+            </a:effectRef>
+            <a:fontRef idx="minor">
+              <a:schemeClr val="lt1"/>
+            </a:fontRef>
+          </p:style>
+          <p:txBody>
+            <a:bodyPr rtlCol="0" anchor="ctr">
+              <a:normAutofit fontScale="40000" lnSpcReduction="20000"/>
+            </a:bodyPr>
+            <a:lstStyle/>
+            <a:p>
+              <a:pPr algn="ctr"/>
+              <a:r>
+                <a:rPr lang="en-US" altLang="ko-KR" dirty="0">
+                  <a:solidFill>
+                    <a:schemeClr val="tx1"/>
+                  </a:solidFill>
+                </a:rPr>
+                <a:t>- New Script</a:t>
+              </a:r>
+              <a:endParaRPr lang="ko-KR" altLang="en-US" dirty="0">
+                <a:solidFill>
+                  <a:schemeClr val="tx1"/>
+                </a:solidFill>
+              </a:endParaRPr>
+            </a:p>
+          </p:txBody>
+        </p:sp>
+        <p:sp>
+          <p:nvSpPr>
+            <p:cNvPr id="71" name="직사각형 70">
+              <a:extLst>
+                <a:ext uri="{FF2B5EF4-FFF2-40B4-BE49-F238E27FC236}">
+                  <a16:creationId xmlns:a16="http://schemas.microsoft.com/office/drawing/2014/main" id="{2FD5D4B1-9346-9C9B-DE0E-8169DB92BB46}"/>
+                </a:ext>
+              </a:extLst>
+            </p:cNvPr>
+            <p:cNvSpPr/>
+            <p:nvPr/>
+          </p:nvSpPr>
+          <p:spPr>
+            <a:xfrm>
+              <a:off x="9000000" y="1620000"/>
+              <a:ext cx="1440000" cy="180000"/>
+            </a:xfrm>
+            <a:prstGeom prst="rect">
+              <a:avLst/>
+            </a:prstGeom>
+            <a:solidFill>
+              <a:schemeClr val="bg1"/>
+            </a:solidFill>
+          </p:spPr>
+          <p:style>
+            <a:lnRef idx="2">
+              <a:schemeClr val="accent1">
+                <a:shade val="15000"/>
+              </a:schemeClr>
+            </a:lnRef>
+            <a:fillRef idx="1">
+              <a:schemeClr val="accent1"/>
+            </a:fillRef>
+            <a:effectRef idx="0">
+              <a:schemeClr val="accent1"/>
+            </a:effectRef>
+            <a:fontRef idx="minor">
+              <a:schemeClr val="lt1"/>
+            </a:fontRef>
+          </p:style>
+          <p:txBody>
+            <a:bodyPr rtlCol="0" anchor="ctr">
+              <a:normAutofit fontScale="40000" lnSpcReduction="20000"/>
+            </a:bodyPr>
+            <a:lstStyle/>
+            <a:p>
+              <a:pPr algn="ctr"/>
+              <a:r>
+                <a:rPr lang="en-US" altLang="ko-KR" dirty="0">
+                  <a:solidFill>
+                    <a:schemeClr val="tx1"/>
+                  </a:solidFill>
+                </a:rPr>
+                <a:t>Camera</a:t>
+              </a:r>
+              <a:endParaRPr lang="ko-KR" altLang="en-US" dirty="0">
+                <a:solidFill>
+                  <a:schemeClr val="tx1"/>
+                </a:solidFill>
+              </a:endParaRPr>
+            </a:p>
+          </p:txBody>
+        </p:sp>
+        <p:sp>
+          <p:nvSpPr>
+            <p:cNvPr id="2" name="직사각형 1">
+              <a:extLst>
+                <a:ext uri="{FF2B5EF4-FFF2-40B4-BE49-F238E27FC236}">
+                  <a16:creationId xmlns:a16="http://schemas.microsoft.com/office/drawing/2014/main" id="{B02F8896-2909-F983-29B6-C0A8BDF0D303}"/>
+                </a:ext>
+              </a:extLst>
+            </p:cNvPr>
+            <p:cNvSpPr/>
+            <p:nvPr/>
+          </p:nvSpPr>
+          <p:spPr>
+            <a:xfrm>
+              <a:off x="9000000" y="1980000"/>
+              <a:ext cx="1440000" cy="180000"/>
+            </a:xfrm>
+            <a:prstGeom prst="rect">
+              <a:avLst/>
+            </a:prstGeom>
+            <a:solidFill>
+              <a:schemeClr val="bg1"/>
+            </a:solidFill>
+          </p:spPr>
+          <p:style>
+            <a:lnRef idx="2">
+              <a:schemeClr val="accent1">
+                <a:shade val="15000"/>
+              </a:schemeClr>
+            </a:lnRef>
+            <a:fillRef idx="1">
+              <a:schemeClr val="accent1"/>
+            </a:fillRef>
+            <a:effectRef idx="0">
+              <a:schemeClr val="accent1"/>
+            </a:effectRef>
+            <a:fontRef idx="minor">
+              <a:schemeClr val="lt1"/>
+            </a:fontRef>
+          </p:style>
+          <p:txBody>
+            <a:bodyPr rtlCol="0" anchor="ctr">
+              <a:normAutofit fontScale="40000" lnSpcReduction="20000"/>
+            </a:bodyPr>
+            <a:lstStyle/>
+            <a:p>
+              <a:pPr algn="ctr"/>
+              <a:r>
+                <a:rPr lang="en-US" altLang="ko-KR" dirty="0">
+                  <a:solidFill>
+                    <a:schemeClr val="tx1"/>
+                  </a:solidFill>
+                </a:rPr>
+                <a:t>UI</a:t>
+              </a:r>
+              <a:endParaRPr lang="ko-KR" altLang="en-US" dirty="0">
+                <a:solidFill>
+                  <a:schemeClr val="tx1"/>
+                </a:solidFill>
+              </a:endParaRPr>
+            </a:p>
+          </p:txBody>
+        </p:sp>
+        <p:sp>
+          <p:nvSpPr>
+            <p:cNvPr id="3" name="직사각형 2">
+              <a:extLst>
+                <a:ext uri="{FF2B5EF4-FFF2-40B4-BE49-F238E27FC236}">
+                  <a16:creationId xmlns:a16="http://schemas.microsoft.com/office/drawing/2014/main" id="{C549F564-83D7-65F1-BC3D-8A185506E222}"/>
+                </a:ext>
+              </a:extLst>
+            </p:cNvPr>
+            <p:cNvSpPr/>
+            <p:nvPr/>
+          </p:nvSpPr>
+          <p:spPr>
+            <a:xfrm>
+              <a:off x="9000000" y="2160000"/>
+              <a:ext cx="1440000" cy="180000"/>
+            </a:xfrm>
+            <a:prstGeom prst="rect">
+              <a:avLst/>
+            </a:prstGeom>
+            <a:solidFill>
+              <a:schemeClr val="bg1">
+                <a:lumMod val="85000"/>
+              </a:schemeClr>
+            </a:solidFill>
+          </p:spPr>
+          <p:style>
+            <a:lnRef idx="2">
+              <a:schemeClr val="accent1">
+                <a:shade val="15000"/>
+              </a:schemeClr>
+            </a:lnRef>
+            <a:fillRef idx="1">
+              <a:schemeClr val="accent1"/>
+            </a:fillRef>
+            <a:effectRef idx="0">
+              <a:schemeClr val="accent1"/>
+            </a:effectRef>
+            <a:fontRef idx="minor">
+              <a:schemeClr val="lt1"/>
+            </a:fontRef>
+          </p:style>
+          <p:txBody>
+            <a:bodyPr rtlCol="0" anchor="ctr">
+              <a:normAutofit fontScale="40000" lnSpcReduction="20000"/>
+            </a:bodyPr>
+            <a:lstStyle/>
+            <a:p>
+              <a:pPr algn="ctr"/>
+              <a:r>
+                <a:rPr lang="en-US" altLang="ko-KR" dirty="0">
+                  <a:solidFill>
+                    <a:schemeClr val="tx1"/>
+                  </a:solidFill>
+                </a:rPr>
+                <a:t>- Canvas</a:t>
+              </a:r>
+              <a:endParaRPr lang="ko-KR" altLang="en-US" dirty="0">
+                <a:solidFill>
+                  <a:schemeClr val="tx1"/>
+                </a:solidFill>
+              </a:endParaRPr>
+            </a:p>
+          </p:txBody>
+        </p:sp>
+        <p:sp>
+          <p:nvSpPr>
+            <p:cNvPr id="16" name="직사각형 15">
+              <a:extLst>
+                <a:ext uri="{FF2B5EF4-FFF2-40B4-BE49-F238E27FC236}">
+                  <a16:creationId xmlns:a16="http://schemas.microsoft.com/office/drawing/2014/main" id="{CDA62807-8E7A-153F-6FD7-898ADE92C653}"/>
+                </a:ext>
+              </a:extLst>
+            </p:cNvPr>
+            <p:cNvSpPr/>
+            <p:nvPr/>
+          </p:nvSpPr>
+          <p:spPr>
+            <a:xfrm>
+              <a:off x="9000000" y="2340000"/>
+              <a:ext cx="1440000" cy="180000"/>
+            </a:xfrm>
+            <a:prstGeom prst="rect">
+              <a:avLst/>
+            </a:prstGeom>
+            <a:solidFill>
+              <a:schemeClr val="bg1">
+                <a:lumMod val="85000"/>
+              </a:schemeClr>
+            </a:solidFill>
+          </p:spPr>
+          <p:style>
+            <a:lnRef idx="2">
+              <a:schemeClr val="accent1">
+                <a:shade val="15000"/>
+              </a:schemeClr>
+            </a:lnRef>
+            <a:fillRef idx="1">
+              <a:schemeClr val="accent1"/>
+            </a:fillRef>
+            <a:effectRef idx="0">
+              <a:schemeClr val="accent1"/>
+            </a:effectRef>
+            <a:fontRef idx="minor">
+              <a:schemeClr val="lt1"/>
+            </a:fontRef>
+          </p:style>
+          <p:txBody>
+            <a:bodyPr rtlCol="0" anchor="ctr">
+              <a:normAutofit fontScale="40000" lnSpcReduction="20000"/>
+            </a:bodyPr>
+            <a:lstStyle/>
+            <a:p>
+              <a:pPr algn="ctr"/>
+              <a:r>
+                <a:rPr lang="en-US" altLang="ko-KR" dirty="0">
+                  <a:solidFill>
+                    <a:schemeClr val="tx1"/>
+                  </a:solidFill>
+                </a:rPr>
+                <a:t>- Text</a:t>
+              </a:r>
               <a:endParaRPr lang="ko-KR" altLang="en-US" dirty="0">
                 <a:solidFill>
                   <a:schemeClr val="tx1"/>
